--- a/thesis/口試簡報.pptx
+++ b/thesis/口試簡報.pptx
@@ -9190,6 +9190,143 @@
           </a:p>
         </p:txBody>
       </p:sp>
+      <p:sp>
+        <p:nvSpPr>
+          <p:cNvPr id="10" name="TextBox 9"/>
+          <p:cNvSpPr txBox="1"/>
+          <p:nvPr/>
+        </p:nvSpPr>
+        <p:spPr>
+          <a:xfrm>
+            <a:off x="640080" y="5532120"/>
+            <a:ext cx="10332720" cy="1188720"/>
+          </a:xfrm>
+          <a:prstGeom prst="rect">
+            <a:avLst/>
+          </a:prstGeom>
+          <a:noFill/>
+        </p:spPr>
+        <p:txBody>
+          <a:bodyPr wrap="square" lIns="0" rIns="0" tIns="0" bIns="0">
+            <a:spAutoFit/>
+          </a:bodyPr>
+          <a:lstStyle/>
+          <a:p>
+            <a:pPr>
+              <a:lnSpc>
+                <a:spcPct val="105000"/>
+              </a:lnSpc>
+              <a:spcAft>
+                <a:spcPts val="100"/>
+              </a:spcAft>
+            </a:pPr>
+            <a:r>
+              <a:rPr sz="750">
+                <a:solidFill>
+                  <a:srgbClr val="6B7280"/>
+                </a:solidFill>
+                <a:latin typeface="Microsoft JhengHei"/>
+              </a:rPr>
+              <a:t>Campello, R. J. G. B., Moulavi, D., Zimek, A., &amp; Sander, J. (2015). Hierarchical density estimates for data clustering, visualization, and outlier detection. ACM Transactions on Knowledge Discovery from Data, 10(1), Article 5.</a:t>
+            </a:r>
+          </a:p>
+          <a:p>
+            <a:pPr>
+              <a:lnSpc>
+                <a:spcPct val="105000"/>
+              </a:lnSpc>
+              <a:spcAft>
+                <a:spcPts val="100"/>
+              </a:spcAft>
+            </a:pPr>
+            <a:r>
+              <a:rPr sz="750">
+                <a:solidFill>
+                  <a:srgbClr val="6B7280"/>
+                </a:solidFill>
+                <a:latin typeface="Microsoft JhengHei"/>
+              </a:rPr>
+              <a:t>Ward, J. H. (1963). Hierarchical grouping to optimize an objective function. Journal of the American Statistical Association, 58(301), 236–244.</a:t>
+            </a:r>
+          </a:p>
+          <a:p>
+            <a:pPr>
+              <a:lnSpc>
+                <a:spcPct val="105000"/>
+              </a:lnSpc>
+              <a:spcAft>
+                <a:spcPts val="100"/>
+              </a:spcAft>
+            </a:pPr>
+            <a:r>
+              <a:rPr sz="750">
+                <a:solidFill>
+                  <a:srgbClr val="6B7280"/>
+                </a:solidFill>
+                <a:latin typeface="Microsoft JhengHei"/>
+              </a:rPr>
+              <a:t>MacQueen, J. (1967). Some methods for classification and analysis of multivariate observations. In Proceedings of the Fifth Berkeley Symposium on Mathematical Statistics and Probability (Vol. 1, pp. 281–297). University of California Press.</a:t>
+            </a:r>
+          </a:p>
+          <a:p>
+            <a:pPr>
+              <a:lnSpc>
+                <a:spcPct val="105000"/>
+              </a:lnSpc>
+              <a:spcAft>
+                <a:spcPts val="100"/>
+              </a:spcAft>
+            </a:pPr>
+            <a:r>
+              <a:rPr sz="750">
+                <a:solidFill>
+                  <a:srgbClr val="6B7280"/>
+                </a:solidFill>
+                <a:latin typeface="Microsoft JhengHei"/>
+              </a:rPr>
+              <a:t>Engle, R. F., &amp; Granger, C. W. J. (1987). Co-integration and error correction: Representation, estimation, and testing. Econometrica, 55(2), 251–276.</a:t>
+            </a:r>
+          </a:p>
+          <a:p>
+            <a:pPr>
+              <a:lnSpc>
+                <a:spcPct val="105000"/>
+              </a:lnSpc>
+              <a:spcAft>
+                <a:spcPts val="100"/>
+              </a:spcAft>
+            </a:pPr>
+            <a:r>
+              <a:rPr sz="750">
+                <a:solidFill>
+                  <a:srgbClr val="6B7280"/>
+                </a:solidFill>
+                <a:latin typeface="Microsoft JhengHei"/>
+              </a:rPr>
+              <a:t>MacKinnon, J. G. (2010). Critical values for cointegration tests (Queen's Economics Department Working Paper No. 1227). Queen's University.</a:t>
+            </a:r>
+          </a:p>
+          <a:p>
+            <a:pPr>
+              <a:lnSpc>
+                <a:spcPct val="105000"/>
+              </a:lnSpc>
+              <a:spcAft>
+                <a:spcPts val="100"/>
+              </a:spcAft>
+            </a:pPr>
+            <a:r>
+              <a:rPr sz="750">
+                <a:solidFill>
+                  <a:srgbClr val="6B7280"/>
+                </a:solidFill>
+                <a:latin typeface="Microsoft JhengHei"/>
+              </a:rPr>
+              <a:t>Sakoe, H., &amp; Chiba, S. (1978). Dynamic programming algorithm optimization for spoken word recognition. IEEE Transactions on Acoustics, Speech, and Signal Processing, ASSP-26(1), 43–49.</a:t>
+            </a:r>
+          </a:p>
+        </p:txBody>
+      </p:sp>
     </p:spTree>
   </p:cSld>
   <p:clrMapOvr>
@@ -9736,6 +9873,48 @@
           </a:p>
         </p:txBody>
       </p:sp>
+      <p:sp>
+        <p:nvSpPr>
+          <p:cNvPr id="9" name="TextBox 8"/>
+          <p:cNvSpPr txBox="1"/>
+          <p:nvPr/>
+        </p:nvSpPr>
+        <p:spPr>
+          <a:xfrm>
+            <a:off x="640080" y="6172200"/>
+            <a:ext cx="10332720" cy="1188720"/>
+          </a:xfrm>
+          <a:prstGeom prst="rect">
+            <a:avLst/>
+          </a:prstGeom>
+          <a:noFill/>
+        </p:spPr>
+        <p:txBody>
+          <a:bodyPr wrap="square" lIns="0" rIns="0" tIns="0" bIns="0">
+            <a:spAutoFit/>
+          </a:bodyPr>
+          <a:lstStyle/>
+          <a:p>
+            <a:pPr>
+              <a:lnSpc>
+                <a:spcPct val="105000"/>
+              </a:lnSpc>
+              <a:spcAft>
+                <a:spcPts val="100"/>
+              </a:spcAft>
+            </a:pPr>
+            <a:r>
+              <a:rPr sz="900">
+                <a:solidFill>
+                  <a:srgbClr val="6B7280"/>
+                </a:solidFill>
+                <a:latin typeface="Microsoft JhengHei"/>
+              </a:rPr>
+              <a:t>Kim, T., &amp; Kim, H. Y. (2019). Optimizing the pairs-trading strategy using deep reinforcement learning with trading and stop-loss boundaries. Complexity, 2019, 3582516.</a:t>
+            </a:r>
+          </a:p>
+        </p:txBody>
+      </p:sp>
     </p:spTree>
   </p:cSld>
   <p:clrMapOvr>
@@ -11436,6 +11615,105 @@
                 <a:latin typeface="Microsoft JhengHei"/>
               </a:rPr>
               <a:t>兩者證據強度不同，後面報告結果時我會分開講。</a:t>
+            </a:r>
+          </a:p>
+        </p:txBody>
+      </p:sp>
+      <p:sp>
+        <p:nvSpPr>
+          <p:cNvPr id="9" name="TextBox 8"/>
+          <p:cNvSpPr txBox="1"/>
+          <p:nvPr/>
+        </p:nvSpPr>
+        <p:spPr>
+          <a:xfrm>
+            <a:off x="640080" y="5806440"/>
+            <a:ext cx="10332720" cy="1188720"/>
+          </a:xfrm>
+          <a:prstGeom prst="rect">
+            <a:avLst/>
+          </a:prstGeom>
+          <a:noFill/>
+        </p:spPr>
+        <p:txBody>
+          <a:bodyPr wrap="square" lIns="0" rIns="0" tIns="0" bIns="0">
+            <a:spAutoFit/>
+          </a:bodyPr>
+          <a:lstStyle/>
+          <a:p>
+            <a:pPr>
+              <a:lnSpc>
+                <a:spcPct val="105000"/>
+              </a:lnSpc>
+              <a:spcAft>
+                <a:spcPts val="100"/>
+              </a:spcAft>
+            </a:pPr>
+            <a:r>
+              <a:rPr sz="800">
+                <a:solidFill>
+                  <a:srgbClr val="6B7280"/>
+                </a:solidFill>
+                <a:latin typeface="Microsoft JhengHei"/>
+              </a:rPr>
+              <a:t>Hurlbert, S. H. (1984). Pseudoreplication and the design of ecological field experiments. Ecological Monographs, 54(2), 187–211.</a:t>
+            </a:r>
+          </a:p>
+          <a:p>
+            <a:pPr>
+              <a:lnSpc>
+                <a:spcPct val="105000"/>
+              </a:lnSpc>
+              <a:spcAft>
+                <a:spcPts val="100"/>
+              </a:spcAft>
+            </a:pPr>
+            <a:r>
+              <a:rPr sz="800">
+                <a:solidFill>
+                  <a:srgbClr val="6B7280"/>
+                </a:solidFill>
+                <a:latin typeface="Microsoft JhengHei"/>
+              </a:rPr>
+              <a:t>Künsch, H. R. (1989). The jackknife and the bootstrap for general stationary observations. The Annals of Statistics, 17(3), 1217–1241.</a:t>
+            </a:r>
+          </a:p>
+          <a:p>
+            <a:pPr>
+              <a:lnSpc>
+                <a:spcPct val="105000"/>
+              </a:lnSpc>
+              <a:spcAft>
+                <a:spcPts val="100"/>
+              </a:spcAft>
+            </a:pPr>
+            <a:r>
+              <a:rPr sz="800">
+                <a:solidFill>
+                  <a:srgbClr val="6B7280"/>
+                </a:solidFill>
+                <a:latin typeface="Microsoft JhengHei"/>
+              </a:rPr>
+              <a:t>Politis, D. N., &amp; Romano, J. P. (1992). A circular block-resampling procedure for stationary data. In R. LePage &amp; L. Billard (Eds.), Exploring the limits of bootstrap (pp. 263–270). Wiley.</a:t>
+            </a:r>
+          </a:p>
+          <a:p>
+            <a:pPr>
+              <a:lnSpc>
+                <a:spcPct val="105000"/>
+              </a:lnSpc>
+              <a:spcAft>
+                <a:spcPts val="100"/>
+              </a:spcAft>
+            </a:pPr>
+            <a:r>
+              <a:rPr sz="800">
+                <a:solidFill>
+                  <a:srgbClr val="6B7280"/>
+                </a:solidFill>
+                <a:latin typeface="Microsoft JhengHei"/>
+              </a:rPr>
+              <a:t>Benjamini, Y., &amp; Hochberg, Y. (1995). Controlling the false discovery rate: A practical and powerful approach to multiple testing. Journal of the Royal Statistical Society: Series B, 57(1), 289–300.</a:t>
             </a:r>
           </a:p>
         </p:txBody>
@@ -16787,6 +17065,48 @@
           </a:p>
         </p:txBody>
       </p:sp>
+      <p:sp>
+        <p:nvSpPr>
+          <p:cNvPr id="8" name="TextBox 7"/>
+          <p:cNvSpPr txBox="1"/>
+          <p:nvPr/>
+        </p:nvSpPr>
+        <p:spPr>
+          <a:xfrm>
+            <a:off x="640080" y="6172200"/>
+            <a:ext cx="10332720" cy="1188720"/>
+          </a:xfrm>
+          <a:prstGeom prst="rect">
+            <a:avLst/>
+          </a:prstGeom>
+          <a:noFill/>
+        </p:spPr>
+        <p:txBody>
+          <a:bodyPr wrap="square" lIns="0" rIns="0" tIns="0" bIns="0">
+            <a:spAutoFit/>
+          </a:bodyPr>
+          <a:lstStyle/>
+          <a:p>
+            <a:pPr>
+              <a:lnSpc>
+                <a:spcPct val="105000"/>
+              </a:lnSpc>
+              <a:spcAft>
+                <a:spcPts val="100"/>
+              </a:spcAft>
+            </a:pPr>
+            <a:r>
+              <a:rPr sz="900">
+                <a:solidFill>
+                  <a:srgbClr val="6B7280"/>
+                </a:solidFill>
+                <a:latin typeface="Microsoft JhengHei"/>
+              </a:rPr>
+              <a:t>Gatev, E., Goetzmann, W. N., &amp; Rouwenhorst, K. G. (2006). Pairs trading: Performance of a relative-value arbitrage rule. The Review of Financial Studies, 19(3), 797–827.</a:t>
+            </a:r>
+          </a:p>
+        </p:txBody>
+      </p:sp>
     </p:spTree>
   </p:cSld>
   <p:clrMapOvr>
@@ -18426,6 +18746,48 @@
           </a:p>
         </p:txBody>
       </p:sp>
+      <p:sp>
+        <p:nvSpPr>
+          <p:cNvPr id="7" name="TextBox 6"/>
+          <p:cNvSpPr txBox="1"/>
+          <p:nvPr/>
+        </p:nvSpPr>
+        <p:spPr>
+          <a:xfrm>
+            <a:off x="640080" y="6172200"/>
+            <a:ext cx="10332720" cy="1188720"/>
+          </a:xfrm>
+          <a:prstGeom prst="rect">
+            <a:avLst/>
+          </a:prstGeom>
+          <a:noFill/>
+        </p:spPr>
+        <p:txBody>
+          <a:bodyPr wrap="square" lIns="0" rIns="0" tIns="0" bIns="0">
+            <a:spAutoFit/>
+          </a:bodyPr>
+          <a:lstStyle/>
+          <a:p>
+            <a:pPr>
+              <a:lnSpc>
+                <a:spcPct val="105000"/>
+              </a:lnSpc>
+              <a:spcAft>
+                <a:spcPts val="100"/>
+              </a:spcAft>
+            </a:pPr>
+            <a:r>
+              <a:rPr sz="900">
+                <a:solidFill>
+                  <a:srgbClr val="6B7280"/>
+                </a:solidFill>
+                <a:latin typeface="Microsoft JhengHei"/>
+              </a:rPr>
+              <a:t>Bailey, D. H., &amp; López de Prado, M. (2014). The deflated Sharpe ratio: Correcting for selection bias, backtest overfitting, and non-normality. The Journal of Portfolio Management, 40(5), 94–107.</a:t>
+            </a:r>
+          </a:p>
+        </p:txBody>
+      </p:sp>
     </p:spTree>
   </p:cSld>
   <p:clrMapOvr>
@@ -19425,6 +19787,48 @@
           </a:graphicData>
         </a:graphic>
       </p:graphicFrame>
+      <p:sp>
+        <p:nvSpPr>
+          <p:cNvPr id="6" name="TextBox 5"/>
+          <p:cNvSpPr txBox="1"/>
+          <p:nvPr/>
+        </p:nvSpPr>
+        <p:spPr>
+          <a:xfrm>
+            <a:off x="640080" y="6172200"/>
+            <a:ext cx="10332720" cy="1188720"/>
+          </a:xfrm>
+          <a:prstGeom prst="rect">
+            <a:avLst/>
+          </a:prstGeom>
+          <a:noFill/>
+        </p:spPr>
+        <p:txBody>
+          <a:bodyPr wrap="square" lIns="0" rIns="0" tIns="0" bIns="0">
+            <a:spAutoFit/>
+          </a:bodyPr>
+          <a:lstStyle/>
+          <a:p>
+            <a:pPr>
+              <a:lnSpc>
+                <a:spcPct val="105000"/>
+              </a:lnSpc>
+              <a:spcAft>
+                <a:spcPts val="100"/>
+              </a:spcAft>
+            </a:pPr>
+            <a:r>
+              <a:rPr sz="900">
+                <a:solidFill>
+                  <a:srgbClr val="6B7280"/>
+                </a:solidFill>
+                <a:latin typeface="Microsoft JhengHei"/>
+              </a:rPr>
+              <a:t>Do, B., &amp; Faff, R. (2010). Does simple pairs trading still work? Financial Analysts Journal, 66(4), 83–95.</a:t>
+            </a:r>
+          </a:p>
+        </p:txBody>
+      </p:sp>
     </p:spTree>
   </p:cSld>
   <p:clrMapOvr>
@@ -22689,7 +23093,7 @@
                 </a:solidFill>
                 <a:latin typeface="Microsoft JhengHei"/>
               </a:rPr>
-              <a:t>納入佣金、買賣價差與市場衝擊後，</a:t>
+              <a:t>納入佣金、買賣價差與放空費用後，獲利</a:t>
             </a:r>
             <a:r>
               <a:rPr sz="1300" b="1">
@@ -22698,7 +23102,7 @@
                 </a:solidFill>
                 <a:latin typeface="Microsoft JhengHei"/>
               </a:rPr>
-              <a:t>多數策略的淨報酬已不再顯著</a:t>
+              <a:t>大幅縮水</a:t>
             </a:r>
             <a:r>
               <a:rPr sz="1300" b="0">
@@ -22707,7 +23111,25 @@
                 </a:solidFill>
                 <a:latin typeface="Microsoft JhengHei"/>
               </a:rPr>
-              <a:t>；2002 年後基本無利可圖。</a:t>
+              <a:t>；且該文明確指出</a:t>
+            </a:r>
+            <a:r>
+              <a:rPr sz="1300" b="1">
+                <a:solidFill>
+                  <a:srgbClr val="1A1A1A"/>
+                </a:solidFill>
+                <a:latin typeface="Microsoft JhengHei"/>
+              </a:rPr>
+              <a:t>2002 年後基本無利可圖</a:t>
+            </a:r>
+            <a:r>
+              <a:rPr sz="1300" b="0">
+                <a:solidFill>
+                  <a:srgbClr val="1A1A1A"/>
+                </a:solidFill>
+                <a:latin typeface="Microsoft JhengHei"/>
+              </a:rPr>
+              <a:t>。</a:t>
             </a:r>
           </a:p>
         </p:txBody>
@@ -22853,6 +23275,105 @@
           </a:p>
         </p:txBody>
       </p:sp>
+      <p:sp>
+        <p:nvSpPr>
+          <p:cNvPr id="10" name="TextBox 9"/>
+          <p:cNvSpPr txBox="1"/>
+          <p:nvPr/>
+        </p:nvSpPr>
+        <p:spPr>
+          <a:xfrm>
+            <a:off x="640080" y="5806440"/>
+            <a:ext cx="10332720" cy="1188720"/>
+          </a:xfrm>
+          <a:prstGeom prst="rect">
+            <a:avLst/>
+          </a:prstGeom>
+          <a:noFill/>
+        </p:spPr>
+        <p:txBody>
+          <a:bodyPr wrap="square" lIns="0" rIns="0" tIns="0" bIns="0">
+            <a:spAutoFit/>
+          </a:bodyPr>
+          <a:lstStyle/>
+          <a:p>
+            <a:pPr>
+              <a:lnSpc>
+                <a:spcPct val="105000"/>
+              </a:lnSpc>
+              <a:spcAft>
+                <a:spcPts val="100"/>
+              </a:spcAft>
+            </a:pPr>
+            <a:r>
+              <a:rPr sz="800">
+                <a:solidFill>
+                  <a:srgbClr val="6B7280"/>
+                </a:solidFill>
+                <a:latin typeface="Microsoft JhengHei"/>
+              </a:rPr>
+              <a:t>Gatev, E., Goetzmann, W. N., &amp; Rouwenhorst, K. G. (2006). Pairs trading: Performance of a relative-value arbitrage rule. The Review of Financial Studies, 19(3), 797–827.</a:t>
+            </a:r>
+          </a:p>
+          <a:p>
+            <a:pPr>
+              <a:lnSpc>
+                <a:spcPct val="105000"/>
+              </a:lnSpc>
+              <a:spcAft>
+                <a:spcPts val="100"/>
+              </a:spcAft>
+            </a:pPr>
+            <a:r>
+              <a:rPr sz="800">
+                <a:solidFill>
+                  <a:srgbClr val="6B7280"/>
+                </a:solidFill>
+                <a:latin typeface="Microsoft JhengHei"/>
+              </a:rPr>
+              <a:t>Do, B., &amp; Faff, R. (2010). Does simple pairs trading still work? Financial Analysts Journal, 66(4), 83–95.</a:t>
+            </a:r>
+          </a:p>
+          <a:p>
+            <a:pPr>
+              <a:lnSpc>
+                <a:spcPct val="105000"/>
+              </a:lnSpc>
+              <a:spcAft>
+                <a:spcPts val="100"/>
+              </a:spcAft>
+            </a:pPr>
+            <a:r>
+              <a:rPr sz="800">
+                <a:solidFill>
+                  <a:srgbClr val="6B7280"/>
+                </a:solidFill>
+                <a:latin typeface="Microsoft JhengHei"/>
+              </a:rPr>
+              <a:t>Do, B., &amp; Faff, R. (2012). Are pairs trading profits robust to trading costs? Journal of Financial Research, 35(2), 261–287.</a:t>
+            </a:r>
+          </a:p>
+          <a:p>
+            <a:pPr>
+              <a:lnSpc>
+                <a:spcPct val="105000"/>
+              </a:lnSpc>
+              <a:spcAft>
+                <a:spcPts val="100"/>
+              </a:spcAft>
+            </a:pPr>
+            <a:r>
+              <a:rPr sz="800">
+                <a:solidFill>
+                  <a:srgbClr val="6B7280"/>
+                </a:solidFill>
+                <a:latin typeface="Microsoft JhengHei"/>
+              </a:rPr>
+              <a:t>Krauss, C. (2017). Statistical arbitrage pairs trading strategies: Review and outlook. Journal of Economic Surveys, 31(2), 513–545.</a:t>
+            </a:r>
+          </a:p>
+        </p:txBody>
+      </p:sp>
     </p:spTree>
   </p:cSld>
   <p:clrMapOvr>
@@ -25787,6 +26308,86 @@
           </a:p>
         </p:txBody>
       </p:sp>
+      <p:sp>
+        <p:nvSpPr>
+          <p:cNvPr id="9" name="TextBox 8"/>
+          <p:cNvSpPr txBox="1"/>
+          <p:nvPr/>
+        </p:nvSpPr>
+        <p:spPr>
+          <a:xfrm>
+            <a:off x="640080" y="5897880"/>
+            <a:ext cx="10332720" cy="1188720"/>
+          </a:xfrm>
+          <a:prstGeom prst="rect">
+            <a:avLst/>
+          </a:prstGeom>
+          <a:noFill/>
+        </p:spPr>
+        <p:txBody>
+          <a:bodyPr wrap="square" lIns="0" rIns="0" tIns="0" bIns="0">
+            <a:spAutoFit/>
+          </a:bodyPr>
+          <a:lstStyle/>
+          <a:p>
+            <a:pPr>
+              <a:lnSpc>
+                <a:spcPct val="105000"/>
+              </a:lnSpc>
+              <a:spcAft>
+                <a:spcPts val="100"/>
+              </a:spcAft>
+            </a:pPr>
+            <a:r>
+              <a:rPr sz="850">
+                <a:solidFill>
+                  <a:srgbClr val="6B7280"/>
+                </a:solidFill>
+                <a:latin typeface="Microsoft JhengHei"/>
+              </a:rPr>
+              <a:t>Han, C., He, Z., &amp; Toh, A. J. W. (2023). Pairs trading via unsupervised learning. European Journal of Operational Research, 307(2), 929–947.</a:t>
+            </a:r>
+          </a:p>
+          <a:p>
+            <a:pPr>
+              <a:lnSpc>
+                <a:spcPct val="105000"/>
+              </a:lnSpc>
+              <a:spcAft>
+                <a:spcPts val="100"/>
+              </a:spcAft>
+            </a:pPr>
+            <a:r>
+              <a:rPr sz="850">
+                <a:solidFill>
+                  <a:srgbClr val="6B7280"/>
+                </a:solidFill>
+                <a:latin typeface="Microsoft JhengHei"/>
+              </a:rPr>
+              <a:t>Sarmento, S. M., &amp; Horta, N. (2020). Enhancing a pairs trading strategy with the application of machine learning. Expert Systems with Applications, 158, 113490.</a:t>
+            </a:r>
+          </a:p>
+          <a:p>
+            <a:pPr>
+              <a:lnSpc>
+                <a:spcPct val="105000"/>
+              </a:lnSpc>
+              <a:spcAft>
+                <a:spcPts val="100"/>
+              </a:spcAft>
+            </a:pPr>
+            <a:r>
+              <a:rPr sz="850">
+                <a:solidFill>
+                  <a:srgbClr val="6B7280"/>
+                </a:solidFill>
+                <a:latin typeface="Microsoft JhengHei"/>
+              </a:rPr>
+              <a:t>Kim, T., &amp; Kim, H. Y. (2019). Optimizing the pairs-trading strategy using deep reinforcement learning with trading and stop-loss boundaries. Complexity, 2019, 3582516.</a:t>
+            </a:r>
+          </a:p>
+        </p:txBody>
+      </p:sp>
     </p:spTree>
   </p:cSld>
   <p:clrMapOvr>
@@ -26100,6 +26701,67 @@
           </a:p>
         </p:txBody>
       </p:sp>
+      <p:sp>
+        <p:nvSpPr>
+          <p:cNvPr id="7" name="TextBox 6"/>
+          <p:cNvSpPr txBox="1"/>
+          <p:nvPr/>
+        </p:nvSpPr>
+        <p:spPr>
+          <a:xfrm>
+            <a:off x="640080" y="5989320"/>
+            <a:ext cx="10332720" cy="1188720"/>
+          </a:xfrm>
+          <a:prstGeom prst="rect">
+            <a:avLst/>
+          </a:prstGeom>
+          <a:noFill/>
+        </p:spPr>
+        <p:txBody>
+          <a:bodyPr wrap="square" lIns="0" rIns="0" tIns="0" bIns="0">
+            <a:spAutoFit/>
+          </a:bodyPr>
+          <a:lstStyle/>
+          <a:p>
+            <a:pPr>
+              <a:lnSpc>
+                <a:spcPct val="105000"/>
+              </a:lnSpc>
+              <a:spcAft>
+                <a:spcPts val="100"/>
+              </a:spcAft>
+            </a:pPr>
+            <a:r>
+              <a:rPr sz="850">
+                <a:solidFill>
+                  <a:srgbClr val="6B7280"/>
+                </a:solidFill>
+                <a:latin typeface="Microsoft JhengHei"/>
+              </a:rPr>
+              <a:t>Kim, T., &amp; Kim, H. Y. (2019). Optimizing the pairs-trading strategy using deep reinforcement learning with trading and stop-loss boundaries. Complexity, 2019, 3582516.</a:t>
+            </a:r>
+          </a:p>
+          <a:p>
+            <a:pPr>
+              <a:lnSpc>
+                <a:spcPct val="105000"/>
+              </a:lnSpc>
+              <a:spcAft>
+                <a:spcPts val="100"/>
+              </a:spcAft>
+            </a:pPr>
+            <a:r>
+              <a:rPr sz="850">
+                <a:solidFill>
+                  <a:srgbClr val="6B7280"/>
+                </a:solidFill>
+                <a:latin typeface="Microsoft JhengHei"/>
+              </a:rPr>
+              <a:t>Sun, Y. (2025). A survey of statistical arbitrage pair trading with machine learning, deep learning, and reinforcement learning methods (Working Papers No. 22/2025). University of Warsaw.</a:t>
+            </a:r>
+          </a:p>
+        </p:txBody>
+      </p:sp>
     </p:spTree>
   </p:cSld>
   <p:clrMapOvr>
@@ -26757,6 +27419,67 @@
           </a:p>
         </p:txBody>
       </p:sp>
+      <p:sp>
+        <p:nvSpPr>
+          <p:cNvPr id="7" name="TextBox 6"/>
+          <p:cNvSpPr txBox="1"/>
+          <p:nvPr/>
+        </p:nvSpPr>
+        <p:spPr>
+          <a:xfrm>
+            <a:off x="640080" y="5989320"/>
+            <a:ext cx="10332720" cy="1188720"/>
+          </a:xfrm>
+          <a:prstGeom prst="rect">
+            <a:avLst/>
+          </a:prstGeom>
+          <a:noFill/>
+        </p:spPr>
+        <p:txBody>
+          <a:bodyPr wrap="square" lIns="0" rIns="0" tIns="0" bIns="0">
+            <a:spAutoFit/>
+          </a:bodyPr>
+          <a:lstStyle/>
+          <a:p>
+            <a:pPr>
+              <a:lnSpc>
+                <a:spcPct val="105000"/>
+              </a:lnSpc>
+              <a:spcAft>
+                <a:spcPts val="100"/>
+              </a:spcAft>
+            </a:pPr>
+            <a:r>
+              <a:rPr sz="850">
+                <a:solidFill>
+                  <a:srgbClr val="6B7280"/>
+                </a:solidFill>
+                <a:latin typeface="Microsoft JhengHei"/>
+              </a:rPr>
+              <a:t>Gatev, E., Goetzmann, W. N., &amp; Rouwenhorst, K. G. (2006). Pairs trading: Performance of a relative-value arbitrage rule. The Review of Financial Studies, 19(3), 797–827.</a:t>
+            </a:r>
+          </a:p>
+          <a:p>
+            <a:pPr>
+              <a:lnSpc>
+                <a:spcPct val="105000"/>
+              </a:lnSpc>
+              <a:spcAft>
+                <a:spcPts val="100"/>
+              </a:spcAft>
+            </a:pPr>
+            <a:r>
+              <a:rPr sz="850">
+                <a:solidFill>
+                  <a:srgbClr val="6B7280"/>
+                </a:solidFill>
+                <a:latin typeface="Microsoft JhengHei"/>
+              </a:rPr>
+              <a:t>Kim, T., &amp; Kim, H. Y. (2019). Optimizing the pairs-trading strategy using deep reinforcement learning with trading and stop-loss boundaries. Complexity, 2019, 3582516.</a:t>
+            </a:r>
+          </a:p>
+        </p:txBody>
+      </p:sp>
     </p:spTree>
   </p:cSld>
   <p:clrMapOvr>
@@ -28411,6 +29134,48 @@
                 <a:latin typeface="Microsoft JhengHei"/>
               </a:rPr>
               <a:t>時點處理三道：成分股只取當時真正在指數內的（避免存活者偏誤）；基本面只取不晚於形成期結束日的最近一筆；特徵只用形成窗內資料。</a:t>
+            </a:r>
+          </a:p>
+        </p:txBody>
+      </p:sp>
+      <p:sp>
+        <p:nvSpPr>
+          <p:cNvPr id="11" name="TextBox 10"/>
+          <p:cNvSpPr txBox="1"/>
+          <p:nvPr/>
+        </p:nvSpPr>
+        <p:spPr>
+          <a:xfrm>
+            <a:off x="640080" y="6172200"/>
+            <a:ext cx="10332720" cy="1188720"/>
+          </a:xfrm>
+          <a:prstGeom prst="rect">
+            <a:avLst/>
+          </a:prstGeom>
+          <a:noFill/>
+        </p:spPr>
+        <p:txBody>
+          <a:bodyPr wrap="square" lIns="0" rIns="0" tIns="0" bIns="0">
+            <a:spAutoFit/>
+          </a:bodyPr>
+          <a:lstStyle/>
+          <a:p>
+            <a:pPr>
+              <a:lnSpc>
+                <a:spcPct val="105000"/>
+              </a:lnSpc>
+              <a:spcAft>
+                <a:spcPts val="100"/>
+              </a:spcAft>
+            </a:pPr>
+            <a:r>
+              <a:rPr sz="900">
+                <a:solidFill>
+                  <a:srgbClr val="6B7280"/>
+                </a:solidFill>
+                <a:latin typeface="Microsoft JhengHei"/>
+              </a:rPr>
+              <a:t>Do, B., &amp; Faff, R. (2012). Are pairs trading profits robust to trading costs? Journal of Financial Research, 35(2), 261–287.</a:t>
             </a:r>
           </a:p>
         </p:txBody>
